--- a/assets/powerpoints/module-n3-epicerie/B1-dans-quelle-allee.pptx
+++ b/assets/powerpoints/module-n3-epicerie/B1-dans-quelle-allee.pptx
@@ -12320,7 +12320,25 @@
                 </a:solidFill>
                 <a:latin typeface="Verdana"/>
               </a:rPr>
-              <a:t>Répéter en donnant les &lt;b&gt;deux&lt;/b&gt; possibilités transforme une question difficile en question facile : la personne répond par un seul mot. C'est plus rapide que « pardon ? », et cela ne demande aucun effort à personne.</a:t>
+              <a:t>Répéter en donnant les </a:t>
+            </a:r>
+            <a:r>
+              <a:rPr sz="2000" b="1" i="0">
+                <a:solidFill>
+                  <a:srgbClr val="4B4F52"/>
+                </a:solidFill>
+                <a:latin typeface="Verdana"/>
+              </a:rPr>
+              <a:t>deux</a:t>
+            </a:r>
+            <a:r>
+              <a:rPr sz="2000" b="0" i="0">
+                <a:solidFill>
+                  <a:srgbClr val="4B4F52"/>
+                </a:solidFill>
+                <a:latin typeface="Verdana"/>
+              </a:rPr>
+              <a:t> possibilités transforme une question difficile en question facile : la personne répond par un seul mot. C'est plus rapide que « pardon ? », et cela ne demande aucun effort à personne.</a:t>
             </a:r>
           </a:p>
         </p:txBody>
